--- a/adatbazis/resrater_adatbazis.pptx
+++ b/adatbazis/resrater_adatbazis.pptx
@@ -108,6 +108,11 @@
       </a:defRPr>
     </a:lvl9pPr>
   </p:defaultTextStyle>
+  <p:extLst>
+    <p:ext uri="{EFAFB233-063F-42B5-8137-9DF3F51BA10A}">
+      <p15:sldGuideLst xmlns:p15="http://schemas.microsoft.com/office/powerpoint/2012/main"/>
+    </p:ext>
+  </p:extLst>
 </p:presentation>
 </file>
 
@@ -3900,15 +3905,15 @@
           <a:p>
             <a:r>
               <a:rPr lang="hu-HU" dirty="0"/>
-              <a:t>Kardos Arnold Tamás, Pálházi </a:t>
-            </a:r>
-            <a:r>
-              <a:rPr lang="hu-HU" dirty="0" err="1"/>
-              <a:t>Bumsted</a:t>
+              <a:t>Kardos Tamás, Pálházi Péter, </a:t>
+            </a:r>
+            <a:r>
+              <a:rPr lang="hu-HU"/>
+              <a:t>Papp Zsombor </a:t>
             </a:r>
             <a:r>
               <a:rPr lang="hu-HU" dirty="0"/>
-              <a:t> Péter, Papp Coleman Zsombor Máté</a:t>
+              <a:t>Máté</a:t>
             </a:r>
           </a:p>
         </p:txBody>

--- a/adatbazis/resrater_adatbazis.pptx
+++ b/adatbazis/resrater_adatbazis.pptx
@@ -10,6 +10,7 @@
     <p:sldId id="257" r:id="rId4"/>
     <p:sldId id="259" r:id="rId5"/>
     <p:sldId id="260" r:id="rId6"/>
+    <p:sldId id="261" r:id="rId7"/>
   </p:sldIdLst>
   <p:sldSz cx="12192000" cy="6858000"/>
   <p:notesSz cx="6858000" cy="9144000"/>
@@ -3872,11 +3873,11 @@
           <a:lstStyle/>
           <a:p>
             <a:r>
-              <a:rPr lang="hu-HU" dirty="0" err="1"/>
+              <a:rPr lang="hu-HU" b="1" dirty="0" err="1"/>
               <a:t>Resrater</a:t>
             </a:r>
             <a:r>
-              <a:rPr lang="hu-HU" dirty="0"/>
+              <a:rPr lang="hu-HU" b="1" dirty="0"/>
               <a:t> adatbázis</a:t>
             </a:r>
           </a:p>
@@ -3905,15 +3906,7 @@
           <a:p>
             <a:r>
               <a:rPr lang="hu-HU" dirty="0"/>
-              <a:t>Kardos Tamás, Pálházi Péter, </a:t>
-            </a:r>
-            <a:r>
-              <a:rPr lang="hu-HU"/>
-              <a:t>Papp Zsombor </a:t>
-            </a:r>
-            <a:r>
-              <a:rPr lang="hu-HU" dirty="0"/>
-              <a:t>Máté</a:t>
+              <a:t>Kardos Tamás, Pálházi Péter, Papp Zsombor Máté</a:t>
             </a:r>
           </a:p>
         </p:txBody>
@@ -3928,6 +3921,9 @@
   <p:clrMapOvr>
     <a:masterClrMapping/>
   </p:clrMapOvr>
+  <p:transition spd="slow">
+    <p:push dir="u"/>
+  </p:transition>
 </p:sld>
 </file>
 
@@ -3970,7 +3966,7 @@
           <a:lstStyle/>
           <a:p>
             <a:r>
-              <a:rPr lang="hu-HU" dirty="0"/>
+              <a:rPr lang="hu-HU" b="1" dirty="0"/>
               <a:t>Téma</a:t>
             </a:r>
           </a:p>
@@ -4037,6 +4033,9 @@
   <p:clrMapOvr>
     <a:masterClrMapping/>
   </p:clrMapOvr>
+  <p:transition spd="slow">
+    <p:push dir="u"/>
+  </p:transition>
 </p:sld>
 </file>
 
@@ -4079,7 +4078,7 @@
           <a:lstStyle/>
           <a:p>
             <a:r>
-              <a:rPr lang="hu-HU" dirty="0"/>
+              <a:rPr lang="hu-HU" b="1" dirty="0"/>
               <a:t>Tervezés első lépései</a:t>
             </a:r>
           </a:p>
@@ -4179,6 +4178,9 @@
   <p:clrMapOvr>
     <a:masterClrMapping/>
   </p:clrMapOvr>
+  <p:transition spd="slow">
+    <p:push dir="u"/>
+  </p:transition>
 </p:sld>
 </file>
 
@@ -4228,7 +4230,7 @@
           <a:lstStyle/>
           <a:p>
             <a:r>
-              <a:rPr lang="hu-HU" dirty="0"/>
+              <a:rPr lang="hu-HU" b="1" dirty="0"/>
               <a:t>Normalizálás</a:t>
             </a:r>
           </a:p>
@@ -5425,6 +5427,9 @@
   <p:clrMapOvr>
     <a:masterClrMapping/>
   </p:clrMapOvr>
+  <p:transition spd="slow">
+    <p:push dir="u"/>
+  </p:transition>
 </p:sld>
 </file>
 
@@ -5467,7 +5472,7 @@
           <a:lstStyle/>
           <a:p>
             <a:r>
-              <a:rPr lang="hu-HU" dirty="0"/>
+              <a:rPr lang="hu-HU" b="1" dirty="0"/>
               <a:t>Majdnem végleges adatbázis</a:t>
             </a:r>
           </a:p>
@@ -5513,6 +5518,78 @@
   <p:clrMapOvr>
     <a:masterClrMapping/>
   </p:clrMapOvr>
+  <p:transition spd="slow">
+    <p:push dir="u"/>
+  </p:transition>
+</p:sld>
+</file>
+
+<file path=ppt/slides/slide6.xml><?xml version="1.0" encoding="utf-8"?>
+<p:sld xmlns:a="http://schemas.openxmlformats.org/drawingml/2006/main" xmlns:r="http://schemas.openxmlformats.org/officeDocument/2006/relationships" xmlns:p="http://schemas.openxmlformats.org/presentationml/2006/main">
+  <p:cSld>
+    <p:spTree>
+      <p:nvGrpSpPr>
+        <p:cNvPr id="1" name=""/>
+        <p:cNvGrpSpPr/>
+        <p:nvPr/>
+      </p:nvGrpSpPr>
+      <p:grpSpPr>
+        <a:xfrm>
+          <a:off x="0" y="0"/>
+          <a:ext cx="0" cy="0"/>
+          <a:chOff x="0" y="0"/>
+          <a:chExt cx="0" cy="0"/>
+        </a:xfrm>
+      </p:grpSpPr>
+      <p:sp>
+        <p:nvSpPr>
+          <p:cNvPr id="2" name="Cím 1">
+            <a:extLst>
+              <a:ext uri="{FF2B5EF4-FFF2-40B4-BE49-F238E27FC236}">
+                <a16:creationId xmlns:a16="http://schemas.microsoft.com/office/drawing/2014/main" id="{F22F637E-EC0C-4038-92F2-19AB9EC2D028}"/>
+              </a:ext>
+            </a:extLst>
+          </p:cNvPr>
+          <p:cNvSpPr>
+            <a:spLocks noGrp="1"/>
+          </p:cNvSpPr>
+          <p:nvPr>
+            <p:ph type="title"/>
+          </p:nvPr>
+        </p:nvSpPr>
+        <p:spPr>
+          <a:xfrm>
+            <a:off x="2207702" y="2897348"/>
+            <a:ext cx="7776595" cy="1063304"/>
+          </a:xfrm>
+        </p:spPr>
+        <p:txBody>
+          <a:bodyPr>
+            <a:normAutofit/>
+          </a:bodyPr>
+          <a:lstStyle/>
+          <a:p>
+            <a:pPr algn="ctr"/>
+            <a:r>
+              <a:rPr lang="hu-HU" sz="6000" b="1" dirty="0"/>
+              <a:t>Köszönöm a figyelmet!</a:t>
+            </a:r>
+          </a:p>
+        </p:txBody>
+      </p:sp>
+    </p:spTree>
+    <p:extLst>
+      <p:ext uri="{BB962C8B-B14F-4D97-AF65-F5344CB8AC3E}">
+        <p14:creationId xmlns:p14="http://schemas.microsoft.com/office/powerpoint/2010/main" val="1842418849"/>
+      </p:ext>
+    </p:extLst>
+  </p:cSld>
+  <p:clrMapOvr>
+    <a:masterClrMapping/>
+  </p:clrMapOvr>
+  <p:transition spd="slow">
+    <p:push dir="u"/>
+  </p:transition>
 </p:sld>
 </file>
 

--- a/adatbazis/resrater_adatbazis.pptx
+++ b/adatbazis/resrater_adatbazis.pptx
@@ -286,7 +286,7 @@
           <a:p>
             <a:fld id="{BA9E69A7-FC6D-46DF-AFDD-D743135C3883}" type="datetimeFigureOut">
               <a:rPr lang="hu-HU" smtClean="0"/>
-              <a:t>2025. 12. 03.</a:t>
+              <a:t>2025. 12. 04.</a:t>
             </a:fld>
             <a:endParaRPr lang="hu-HU"/>
           </a:p>
@@ -616,7 +616,7 @@
           <a:p>
             <a:fld id="{BA9E69A7-FC6D-46DF-AFDD-D743135C3883}" type="datetimeFigureOut">
               <a:rPr lang="hu-HU" smtClean="0"/>
-              <a:t>2025. 12. 03.</a:t>
+              <a:t>2025. 12. 04.</a:t>
             </a:fld>
             <a:endParaRPr lang="hu-HU"/>
           </a:p>
@@ -796,7 +796,7 @@
           <a:p>
             <a:fld id="{BA9E69A7-FC6D-46DF-AFDD-D743135C3883}" type="datetimeFigureOut">
               <a:rPr lang="hu-HU" smtClean="0"/>
-              <a:t>2025. 12. 03.</a:t>
+              <a:t>2025. 12. 04.</a:t>
             </a:fld>
             <a:endParaRPr lang="hu-HU"/>
           </a:p>
@@ -966,7 +966,7 @@
           <a:p>
             <a:fld id="{BA9E69A7-FC6D-46DF-AFDD-D743135C3883}" type="datetimeFigureOut">
               <a:rPr lang="hu-HU" smtClean="0"/>
-              <a:t>2025. 12. 03.</a:t>
+              <a:t>2025. 12. 04.</a:t>
             </a:fld>
             <a:endParaRPr lang="hu-HU"/>
           </a:p>
@@ -1243,7 +1243,7 @@
           <a:p>
             <a:fld id="{BA9E69A7-FC6D-46DF-AFDD-D743135C3883}" type="datetimeFigureOut">
               <a:rPr lang="hu-HU" smtClean="0"/>
-              <a:t>2025. 12. 03.</a:t>
+              <a:t>2025. 12. 04.</a:t>
             </a:fld>
             <a:endParaRPr lang="hu-HU"/>
           </a:p>
@@ -1637,7 +1637,7 @@
           <a:p>
             <a:fld id="{BA9E69A7-FC6D-46DF-AFDD-D743135C3883}" type="datetimeFigureOut">
               <a:rPr lang="hu-HU" smtClean="0"/>
-              <a:t>2025. 12. 03.</a:t>
+              <a:t>2025. 12. 04.</a:t>
             </a:fld>
             <a:endParaRPr lang="hu-HU"/>
           </a:p>
@@ -2114,7 +2114,7 @@
           <a:p>
             <a:fld id="{BA9E69A7-FC6D-46DF-AFDD-D743135C3883}" type="datetimeFigureOut">
               <a:rPr lang="hu-HU" smtClean="0"/>
-              <a:t>2025. 12. 03.</a:t>
+              <a:t>2025. 12. 04.</a:t>
             </a:fld>
             <a:endParaRPr lang="hu-HU"/>
           </a:p>
@@ -2232,7 +2232,7 @@
           <a:p>
             <a:fld id="{BA9E69A7-FC6D-46DF-AFDD-D743135C3883}" type="datetimeFigureOut">
               <a:rPr lang="hu-HU" smtClean="0"/>
-              <a:t>2025. 12. 03.</a:t>
+              <a:t>2025. 12. 04.</a:t>
             </a:fld>
             <a:endParaRPr lang="hu-HU"/>
           </a:p>
@@ -2327,7 +2327,7 @@
           <a:p>
             <a:fld id="{BA9E69A7-FC6D-46DF-AFDD-D743135C3883}" type="datetimeFigureOut">
               <a:rPr lang="hu-HU" smtClean="0"/>
-              <a:t>2025. 12. 03.</a:t>
+              <a:t>2025. 12. 04.</a:t>
             </a:fld>
             <a:endParaRPr lang="hu-HU"/>
           </a:p>
@@ -2673,7 +2673,7 @@
           <a:p>
             <a:fld id="{BA9E69A7-FC6D-46DF-AFDD-D743135C3883}" type="datetimeFigureOut">
               <a:rPr lang="hu-HU" smtClean="0"/>
-              <a:t>2025. 12. 03.</a:t>
+              <a:t>2025. 12. 04.</a:t>
             </a:fld>
             <a:endParaRPr lang="hu-HU"/>
           </a:p>
@@ -3061,7 +3061,7 @@
           <a:p>
             <a:fld id="{BA9E69A7-FC6D-46DF-AFDD-D743135C3883}" type="datetimeFigureOut">
               <a:rPr lang="hu-HU" smtClean="0"/>
-              <a:t>2025. 12. 03.</a:t>
+              <a:t>2025. 12. 04.</a:t>
             </a:fld>
             <a:endParaRPr lang="hu-HU"/>
           </a:p>
@@ -3339,7 +3339,7 @@
           <a:p>
             <a:fld id="{BA9E69A7-FC6D-46DF-AFDD-D743135C3883}" type="datetimeFigureOut">
               <a:rPr lang="hu-HU" smtClean="0"/>
-              <a:t>2025. 12. 03.</a:t>
+              <a:t>2025. 12. 04.</a:t>
             </a:fld>
             <a:endParaRPr lang="hu-HU"/>
           </a:p>
@@ -4012,14 +4012,19 @@
           <a:p>
             <a:r>
               <a:rPr lang="hu-HU" dirty="0"/>
-              <a:t>Részletes értékelés az étterem szolgáltatás</a:t>
+              <a:t>Részletes értékelés az étterem szolgáltatásairól</a:t>
             </a:r>
           </a:p>
           <a:p>
             <a:r>
               <a:rPr lang="hu-HU" dirty="0"/>
-              <a:t>Reklámnak is számít mert teljesen ingyenes és az éttermek regisztrálnak önmaguk</a:t>
-            </a:r>
+              <a:t>Reklámnak is számít mert teljesen ingyenes és az éttermek </a:t>
+            </a:r>
+            <a:r>
+              <a:rPr lang="hu-HU"/>
+              <a:t>regisztrálnak önállóan</a:t>
+            </a:r>
+            <a:endParaRPr lang="hu-HU" dirty="0"/>
           </a:p>
         </p:txBody>
       </p:sp>
